--- a/presentation/slides.pptx
+++ b/presentation/slides.pptx
@@ -950,7 +950,7 @@
           <a:p>
             <a:r>
               <a:rPr lang="en-US" dirty="0"/>
-              <a:t>Point at the Bob→rank_root_causes edge. An earlier revision of our own diagram had the server reading its own tools; we caught it and corrected it, because it quietly demotes Bob.</a:t>
+              <a:t>Point at the Bob-to-rank_root_causes edge, top right of the diagram. An earlier revision of this same diagram had the server reading its own tools; we caught it and corrected it, because it quietly demotes Bob to a chat skin. Everything below the tool row is ours: two trained models, a case store, simulated telemetry, and watsonx.ai behind the reasoning tools.</a:t>
             </a:r>
             <a:endParaRPr lang="en-US" dirty="0"/>
           </a:p>
@@ -10256,8 +10256,8 @@
         </p:nvSpPr>
         <p:spPr>
           <a:xfrm>
-            <a:off x="640080" y="384048"/>
-            <a:ext cx="10424160" cy="777240"/>
+            <a:off x="594360" y="292608"/>
+            <a:ext cx="8138160" cy="566928"/>
           </a:xfrm>
           <a:prstGeom prst="rect">
             <a:avLst/>
@@ -10273,7 +10273,7 @@
               <a:buNone/>
             </a:pPr>
             <a:r>
-              <a:rPr lang="en-US" sz="3800" b="1" dirty="0">
+              <a:rPr lang="en-US" sz="3200" b="1" dirty="0">
                 <a:solidFill>
                   <a:srgbClr val="0E1C2B"/>
                 </a:solidFill>
@@ -10283,7 +10283,7 @@
               </a:rPr>
               <a:t>Bob orchestrates. The server exposes.</a:t>
             </a:r>
-            <a:endParaRPr lang="en-US" sz="3800" dirty="0"/>
+            <a:endParaRPr lang="en-US" sz="3200" dirty="0"/>
           </a:p>
         </p:txBody>
       </p:sp>
@@ -10295,822 +10295,8 @@
         </p:nvSpPr>
         <p:spPr>
           <a:xfrm>
-            <a:off x="640080" y="1152144"/>
-            <a:ext cx="10424160" cy="365760"/>
-          </a:xfrm>
-          <a:prstGeom prst="rect">
-            <a:avLst/>
-          </a:prstGeom>
-          <a:noFill/>
-          <a:ln/>
-        </p:spPr>
-        <p:txBody>
-          <a:bodyPr wrap="square" lIns="0" tIns="0" rIns="0" bIns="0" rtlCol="0" anchor="ctr"/>
-          <a:lstStyle/>
-          <a:p>
-            <a:pPr indent="0" marL="0">
-              <a:buNone/>
-            </a:pPr>
-            <a:r>
-              <a:rPr lang="en-US" sz="1500" dirty="0">
-                <a:solidFill>
-                  <a:srgbClr val="6A7B87"/>
-                </a:solidFill>
-                <a:latin typeface="Calibri" pitchFamily="34" charset="0"/>
-                <a:ea typeface="Calibri" pitchFamily="34" charset="-122"/>
-                <a:cs typeface="Calibri" pitchFamily="34" charset="-120"/>
-              </a:rPr>
-              <a:t>9 MCP tools over stdio — Bob chooses and chains them</a:t>
-            </a:r>
-            <a:endParaRPr lang="en-US" sz="1500" dirty="0"/>
-          </a:p>
-        </p:txBody>
-      </p:sp>
-      <p:sp>
-        <p:nvSpPr>
-          <p:cNvPr id="4" name="Shape 2"/>
-          <p:cNvSpPr/>
-          <p:nvPr/>
-        </p:nvSpPr>
-        <p:spPr>
-          <a:xfrm>
-            <a:off x="685800" y="2148840"/>
-            <a:ext cx="2011680" cy="1371600"/>
-          </a:xfrm>
-          <a:prstGeom prst="roundRect">
-            <a:avLst>
-              <a:gd name="adj" fmla="val 2667"/>
-            </a:avLst>
-          </a:prstGeom>
-          <a:solidFill>
-            <a:srgbClr val="FFFFFF"/>
-          </a:solidFill>
-          <a:ln w="12700">
-            <a:solidFill>
-              <a:srgbClr val="D6DEE4"/>
-            </a:solidFill>
-            <a:prstDash val="solid"/>
-          </a:ln>
-          <a:effectLst>
-            <a:outerShdw sx="100000" sy="100000" kx="0" ky="0" algn="bl" rotWithShape="0" blurRad="127000" dist="25400" dir="5400000">
-              <a:srgbClr val="9AA9B4">
-                <a:alpha val="22000"/>
-              </a:srgbClr>
-            </a:outerShdw>
-          </a:effectLst>
-        </p:spPr>
-      </p:sp>
-      <p:sp>
-        <p:nvSpPr>
-          <p:cNvPr id="5" name="Text 3"/>
-          <p:cNvSpPr txBox="1"/>
-          <p:nvPr/>
-        </p:nvSpPr>
-        <p:spPr>
-          <a:xfrm>
-            <a:off x="795528" y="2331720"/>
-            <a:ext cx="1792224" cy="384048"/>
-          </a:xfrm>
-          <a:prstGeom prst="rect">
-            <a:avLst/>
-          </a:prstGeom>
-          <a:noFill/>
-          <a:ln/>
-        </p:spPr>
-        <p:txBody>
-          <a:bodyPr wrap="square" lIns="0" tIns="0" rIns="0" bIns="0" rtlCol="0" anchor="ctr"/>
-          <a:lstStyle/>
-          <a:p>
-            <a:pPr algn="ctr" indent="0" marL="0">
-              <a:buNone/>
-            </a:pPr>
-            <a:r>
-              <a:rPr lang="en-US" sz="1500" b="1" dirty="0">
-                <a:solidFill>
-                  <a:srgbClr val="0E1C2B"/>
-                </a:solidFill>
-                <a:latin typeface="Calibri" pitchFamily="34" charset="0"/>
-                <a:ea typeface="Calibri" pitchFamily="34" charset="-122"/>
-                <a:cs typeface="Calibri" pitchFamily="34" charset="-120"/>
-              </a:rPr>
-              <a:t>Engineer</a:t>
-            </a:r>
-            <a:endParaRPr lang="en-US" sz="1500" dirty="0"/>
-          </a:p>
-        </p:txBody>
-      </p:sp>
-      <p:sp>
-        <p:nvSpPr>
-          <p:cNvPr id="6" name="Text 4"/>
-          <p:cNvSpPr txBox="1"/>
-          <p:nvPr/>
-        </p:nvSpPr>
-        <p:spPr>
-          <a:xfrm>
-            <a:off x="795528" y="2743200"/>
-            <a:ext cx="1792224" cy="640080"/>
-          </a:xfrm>
-          <a:prstGeom prst="rect">
-            <a:avLst/>
-          </a:prstGeom>
-          <a:noFill/>
-          <a:ln/>
-        </p:spPr>
-        <p:txBody>
-          <a:bodyPr wrap="square" lIns="0" tIns="0" rIns="0" bIns="0" rtlCol="0" anchor="ctr"/>
-          <a:lstStyle/>
-          <a:p>
-            <a:pPr algn="ctr" indent="0" marL="0">
-              <a:buNone/>
-            </a:pPr>
-            <a:r>
-              <a:rPr lang="en-US" sz="1100" dirty="0">
-                <a:solidFill>
-                  <a:srgbClr val="6A7B87"/>
-                </a:solidFill>
-                <a:latin typeface="Calibri" pitchFamily="34" charset="0"/>
-                <a:ea typeface="Calibri" pitchFamily="34" charset="-122"/>
-                <a:cs typeface="Calibri" pitchFamily="34" charset="-120"/>
-              </a:rPr>
-              <a:t>natural language</a:t>
-            </a:r>
-            <a:endParaRPr lang="en-US" sz="1100" dirty="0"/>
-          </a:p>
-        </p:txBody>
-      </p:sp>
-      <p:sp>
-        <p:nvSpPr>
-          <p:cNvPr id="7" name="Text 5"/>
-          <p:cNvSpPr txBox="1"/>
-          <p:nvPr/>
-        </p:nvSpPr>
-        <p:spPr>
-          <a:xfrm>
-            <a:off x="2697480" y="2560320"/>
-            <a:ext cx="274320" cy="457200"/>
-          </a:xfrm>
-          <a:prstGeom prst="rect">
-            <a:avLst/>
-          </a:prstGeom>
-          <a:noFill/>
-          <a:ln/>
-        </p:spPr>
-        <p:txBody>
-          <a:bodyPr wrap="square" lIns="0" tIns="0" rIns="0" bIns="0" rtlCol="0" anchor="ctr"/>
-          <a:lstStyle/>
-          <a:p>
-            <a:pPr algn="ctr" indent="0" marL="0">
-              <a:buNone/>
-            </a:pPr>
-            <a:r>
-              <a:rPr lang="en-US" sz="2000" dirty="0">
-                <a:solidFill>
-                  <a:srgbClr val="1B8A8F"/>
-                </a:solidFill>
-                <a:latin typeface="Calibri" pitchFamily="34" charset="0"/>
-                <a:ea typeface="Calibri" pitchFamily="34" charset="-122"/>
-                <a:cs typeface="Calibri" pitchFamily="34" charset="-120"/>
-              </a:rPr>
-              <a:t>→</a:t>
-            </a:r>
-            <a:endParaRPr lang="en-US" sz="2000" dirty="0"/>
-          </a:p>
-        </p:txBody>
-      </p:sp>
-      <p:sp>
-        <p:nvSpPr>
-          <p:cNvPr id="8" name="Shape 6"/>
-          <p:cNvSpPr/>
-          <p:nvPr/>
-        </p:nvSpPr>
-        <p:spPr>
-          <a:xfrm>
-            <a:off x="2953512" y="2148840"/>
-            <a:ext cx="2011680" cy="1371600"/>
-          </a:xfrm>
-          <a:prstGeom prst="roundRect">
-            <a:avLst>
-              <a:gd name="adj" fmla="val 2667"/>
-            </a:avLst>
-          </a:prstGeom>
-          <a:solidFill>
-            <a:srgbClr val="17405C"/>
-          </a:solidFill>
-          <a:ln w="12700">
-            <a:solidFill>
-              <a:srgbClr val="17405C"/>
-            </a:solidFill>
-            <a:prstDash val="solid"/>
-          </a:ln>
-        </p:spPr>
-      </p:sp>
-      <p:sp>
-        <p:nvSpPr>
-          <p:cNvPr id="9" name="Text 7"/>
-          <p:cNvSpPr txBox="1"/>
-          <p:nvPr/>
-        </p:nvSpPr>
-        <p:spPr>
-          <a:xfrm>
-            <a:off x="3063240" y="2331720"/>
-            <a:ext cx="1792224" cy="384048"/>
-          </a:xfrm>
-          <a:prstGeom prst="rect">
-            <a:avLst/>
-          </a:prstGeom>
-          <a:noFill/>
-          <a:ln/>
-        </p:spPr>
-        <p:txBody>
-          <a:bodyPr wrap="square" lIns="0" tIns="0" rIns="0" bIns="0" rtlCol="0" anchor="ctr"/>
-          <a:lstStyle/>
-          <a:p>
-            <a:pPr algn="ctr" indent="0" marL="0">
-              <a:buNone/>
-            </a:pPr>
-            <a:r>
-              <a:rPr lang="en-US" sz="1500" b="1" dirty="0">
-                <a:solidFill>
-                  <a:srgbClr val="FFFFFF"/>
-                </a:solidFill>
-                <a:latin typeface="Calibri" pitchFamily="34" charset="0"/>
-                <a:ea typeface="Calibri" pitchFamily="34" charset="-122"/>
-                <a:cs typeface="Calibri" pitchFamily="34" charset="-120"/>
-              </a:rPr>
-              <a:t>IBM Bob</a:t>
-            </a:r>
-            <a:endParaRPr lang="en-US" sz="1500" dirty="0"/>
-          </a:p>
-        </p:txBody>
-      </p:sp>
-      <p:sp>
-        <p:nvSpPr>
-          <p:cNvPr id="10" name="Text 8"/>
-          <p:cNvSpPr txBox="1"/>
-          <p:nvPr/>
-        </p:nvSpPr>
-        <p:spPr>
-          <a:xfrm>
-            <a:off x="3063240" y="2743200"/>
-            <a:ext cx="1792224" cy="640080"/>
-          </a:xfrm>
-          <a:prstGeom prst="rect">
-            <a:avLst/>
-          </a:prstGeom>
-          <a:noFill/>
-          <a:ln/>
-        </p:spPr>
-        <p:txBody>
-          <a:bodyPr wrap="square" lIns="0" tIns="0" rIns="0" bIns="0" rtlCol="0" anchor="ctr"/>
-          <a:lstStyle/>
-          <a:p>
-            <a:pPr algn="ctr" indent="0" marL="0">
-              <a:buNone/>
-            </a:pPr>
-            <a:r>
-              <a:rPr lang="en-US" sz="1100" dirty="0">
-                <a:solidFill>
-                  <a:srgbClr val="9FB3C2"/>
-                </a:solidFill>
-                <a:latin typeface="Calibri" pitchFamily="34" charset="0"/>
-                <a:ea typeface="Calibri" pitchFamily="34" charset="-122"/>
-                <a:cs typeface="Calibri" pitchFamily="34" charset="-120"/>
-              </a:rPr>
-              <a:t>agent loop · ORCHESTRATOR</a:t>
-            </a:r>
-            <a:endParaRPr lang="en-US" sz="1100" dirty="0"/>
-          </a:p>
-        </p:txBody>
-      </p:sp>
-      <p:sp>
-        <p:nvSpPr>
-          <p:cNvPr id="11" name="Text 9"/>
-          <p:cNvSpPr txBox="1"/>
-          <p:nvPr/>
-        </p:nvSpPr>
-        <p:spPr>
-          <a:xfrm>
-            <a:off x="4965192" y="2560320"/>
-            <a:ext cx="274320" cy="457200"/>
-          </a:xfrm>
-          <a:prstGeom prst="rect">
-            <a:avLst/>
-          </a:prstGeom>
-          <a:noFill/>
-          <a:ln/>
-        </p:spPr>
-        <p:txBody>
-          <a:bodyPr wrap="square" lIns="0" tIns="0" rIns="0" bIns="0" rtlCol="0" anchor="ctr"/>
-          <a:lstStyle/>
-          <a:p>
-            <a:pPr algn="ctr" indent="0" marL="0">
-              <a:buNone/>
-            </a:pPr>
-            <a:r>
-              <a:rPr lang="en-US" sz="2000" dirty="0">
-                <a:solidFill>
-                  <a:srgbClr val="1B8A8F"/>
-                </a:solidFill>
-                <a:latin typeface="Calibri" pitchFamily="34" charset="0"/>
-                <a:ea typeface="Calibri" pitchFamily="34" charset="-122"/>
-                <a:cs typeface="Calibri" pitchFamily="34" charset="-120"/>
-              </a:rPr>
-              <a:t>→</a:t>
-            </a:r>
-            <a:endParaRPr lang="en-US" sz="2000" dirty="0"/>
-          </a:p>
-        </p:txBody>
-      </p:sp>
-      <p:sp>
-        <p:nvSpPr>
-          <p:cNvPr id="12" name="Shape 10"/>
-          <p:cNvSpPr/>
-          <p:nvPr/>
-        </p:nvSpPr>
-        <p:spPr>
-          <a:xfrm>
-            <a:off x="5221224" y="2148840"/>
-            <a:ext cx="2011680" cy="1371600"/>
-          </a:xfrm>
-          <a:prstGeom prst="roundRect">
-            <a:avLst>
-              <a:gd name="adj" fmla="val 2667"/>
-            </a:avLst>
-          </a:prstGeom>
-          <a:solidFill>
-            <a:srgbClr val="FFFFFF"/>
-          </a:solidFill>
-          <a:ln w="12700">
-            <a:solidFill>
-              <a:srgbClr val="D6DEE4"/>
-            </a:solidFill>
-            <a:prstDash val="solid"/>
-          </a:ln>
-          <a:effectLst>
-            <a:outerShdw sx="100000" sy="100000" kx="0" ky="0" algn="bl" rotWithShape="0" blurRad="127000" dist="25400" dir="5400000">
-              <a:srgbClr val="9AA9B4">
-                <a:alpha val="22000"/>
-              </a:srgbClr>
-            </a:outerShdw>
-          </a:effectLst>
-        </p:spPr>
-      </p:sp>
-      <p:sp>
-        <p:nvSpPr>
-          <p:cNvPr id="13" name="Text 11"/>
-          <p:cNvSpPr txBox="1"/>
-          <p:nvPr/>
-        </p:nvSpPr>
-        <p:spPr>
-          <a:xfrm>
-            <a:off x="5330952" y="2331720"/>
-            <a:ext cx="1792224" cy="384048"/>
-          </a:xfrm>
-          <a:prstGeom prst="rect">
-            <a:avLst/>
-          </a:prstGeom>
-          <a:noFill/>
-          <a:ln/>
-        </p:spPr>
-        <p:txBody>
-          <a:bodyPr wrap="square" lIns="0" tIns="0" rIns="0" bIns="0" rtlCol="0" anchor="ctr"/>
-          <a:lstStyle/>
-          <a:p>
-            <a:pPr algn="ctr" indent="0" marL="0">
-              <a:buNone/>
-            </a:pPr>
-            <a:r>
-              <a:rPr lang="en-US" sz="1500" b="1" dirty="0">
-                <a:solidFill>
-                  <a:srgbClr val="0E1C2B"/>
-                </a:solidFill>
-                <a:latin typeface="Calibri" pitchFamily="34" charset="0"/>
-                <a:ea typeface="Calibri" pitchFamily="34" charset="-122"/>
-                <a:cs typeface="Calibri" pitchFamily="34" charset="-120"/>
-              </a:rPr>
-              <a:t>MCP Server</a:t>
-            </a:r>
-            <a:endParaRPr lang="en-US" sz="1500" dirty="0"/>
-          </a:p>
-        </p:txBody>
-      </p:sp>
-      <p:sp>
-        <p:nvSpPr>
-          <p:cNvPr id="14" name="Text 12"/>
-          <p:cNvSpPr txBox="1"/>
-          <p:nvPr/>
-        </p:nvSpPr>
-        <p:spPr>
-          <a:xfrm>
-            <a:off x="5330952" y="2743200"/>
-            <a:ext cx="1792224" cy="640080"/>
-          </a:xfrm>
-          <a:prstGeom prst="rect">
-            <a:avLst/>
-          </a:prstGeom>
-          <a:noFill/>
-          <a:ln/>
-        </p:spPr>
-        <p:txBody>
-          <a:bodyPr wrap="square" lIns="0" tIns="0" rIns="0" bIns="0" rtlCol="0" anchor="ctr"/>
-          <a:lstStyle/>
-          <a:p>
-            <a:pPr algn="ctr" indent="0" marL="0">
-              <a:buNone/>
-            </a:pPr>
-            <a:r>
-              <a:rPr lang="en-US" sz="1100" dirty="0">
-                <a:solidFill>
-                  <a:srgbClr val="6A7B87"/>
-                </a:solidFill>
-                <a:latin typeface="Calibri" pitchFamily="34" charset="0"/>
-                <a:ea typeface="Calibri" pitchFamily="34" charset="-122"/>
-                <a:cs typeface="Calibri" pitchFamily="34" charset="-120"/>
-              </a:rPr>
-              <a:t>9 tools · stdio</a:t>
-            </a:r>
-            <a:endParaRPr lang="en-US" sz="1100" dirty="0"/>
-          </a:p>
-        </p:txBody>
-      </p:sp>
-      <p:sp>
-        <p:nvSpPr>
-          <p:cNvPr id="15" name="Text 13"/>
-          <p:cNvSpPr txBox="1"/>
-          <p:nvPr/>
-        </p:nvSpPr>
-        <p:spPr>
-          <a:xfrm>
-            <a:off x="7232904" y="2560320"/>
-            <a:ext cx="274320" cy="457200"/>
-          </a:xfrm>
-          <a:prstGeom prst="rect">
-            <a:avLst/>
-          </a:prstGeom>
-          <a:noFill/>
-          <a:ln/>
-        </p:spPr>
-        <p:txBody>
-          <a:bodyPr wrap="square" lIns="0" tIns="0" rIns="0" bIns="0" rtlCol="0" anchor="ctr"/>
-          <a:lstStyle/>
-          <a:p>
-            <a:pPr algn="ctr" indent="0" marL="0">
-              <a:buNone/>
-            </a:pPr>
-            <a:r>
-              <a:rPr lang="en-US" sz="2000" dirty="0">
-                <a:solidFill>
-                  <a:srgbClr val="1B8A8F"/>
-                </a:solidFill>
-                <a:latin typeface="Calibri" pitchFamily="34" charset="0"/>
-                <a:ea typeface="Calibri" pitchFamily="34" charset="-122"/>
-                <a:cs typeface="Calibri" pitchFamily="34" charset="-120"/>
-              </a:rPr>
-              <a:t>→</a:t>
-            </a:r>
-            <a:endParaRPr lang="en-US" sz="2000" dirty="0"/>
-          </a:p>
-        </p:txBody>
-      </p:sp>
-      <p:sp>
-        <p:nvSpPr>
-          <p:cNvPr id="16" name="Shape 14"/>
-          <p:cNvSpPr/>
-          <p:nvPr/>
-        </p:nvSpPr>
-        <p:spPr>
-          <a:xfrm>
-            <a:off x="7488936" y="2148840"/>
-            <a:ext cx="2011680" cy="1371600"/>
-          </a:xfrm>
-          <a:prstGeom prst="roundRect">
-            <a:avLst>
-              <a:gd name="adj" fmla="val 2667"/>
-            </a:avLst>
-          </a:prstGeom>
-          <a:solidFill>
-            <a:srgbClr val="FFFFFF"/>
-          </a:solidFill>
-          <a:ln w="12700">
-            <a:solidFill>
-              <a:srgbClr val="D6DEE4"/>
-            </a:solidFill>
-            <a:prstDash val="solid"/>
-          </a:ln>
-          <a:effectLst>
-            <a:outerShdw sx="100000" sy="100000" kx="0" ky="0" algn="bl" rotWithShape="0" blurRad="127000" dist="25400" dir="5400000">
-              <a:srgbClr val="9AA9B4">
-                <a:alpha val="22000"/>
-              </a:srgbClr>
-            </a:outerShdw>
-          </a:effectLst>
-        </p:spPr>
-      </p:sp>
-      <p:sp>
-        <p:nvSpPr>
-          <p:cNvPr id="17" name="Text 15"/>
-          <p:cNvSpPr txBox="1"/>
-          <p:nvPr/>
-        </p:nvSpPr>
-        <p:spPr>
-          <a:xfrm>
-            <a:off x="7598664" y="2331720"/>
-            <a:ext cx="1792224" cy="384048"/>
-          </a:xfrm>
-          <a:prstGeom prst="rect">
-            <a:avLst/>
-          </a:prstGeom>
-          <a:noFill/>
-          <a:ln/>
-        </p:spPr>
-        <p:txBody>
-          <a:bodyPr wrap="square" lIns="0" tIns="0" rIns="0" bIns="0" rtlCol="0" anchor="ctr"/>
-          <a:lstStyle/>
-          <a:p>
-            <a:pPr algn="ctr" indent="0" marL="0">
-              <a:buNone/>
-            </a:pPr>
-            <a:r>
-              <a:rPr lang="en-US" sz="1500" b="1" dirty="0">
-                <a:solidFill>
-                  <a:srgbClr val="0E1C2B"/>
-                </a:solidFill>
-                <a:latin typeface="Calibri" pitchFamily="34" charset="0"/>
-                <a:ea typeface="Calibri" pitchFamily="34" charset="-122"/>
-                <a:cs typeface="Calibri" pitchFamily="34" charset="-120"/>
-              </a:rPr>
-              <a:t>Models</a:t>
-            </a:r>
-            <a:endParaRPr lang="en-US" sz="1500" dirty="0"/>
-          </a:p>
-        </p:txBody>
-      </p:sp>
-      <p:sp>
-        <p:nvSpPr>
-          <p:cNvPr id="18" name="Text 16"/>
-          <p:cNvSpPr txBox="1"/>
-          <p:nvPr/>
-        </p:nvSpPr>
-        <p:spPr>
-          <a:xfrm>
-            <a:off x="7598664" y="2743200"/>
-            <a:ext cx="1792224" cy="640080"/>
-          </a:xfrm>
-          <a:prstGeom prst="rect">
-            <a:avLst/>
-          </a:prstGeom>
-          <a:noFill/>
-          <a:ln/>
-        </p:spPr>
-        <p:txBody>
-          <a:bodyPr wrap="square" lIns="0" tIns="0" rIns="0" bIns="0" rtlCol="0" anchor="ctr"/>
-          <a:lstStyle/>
-          <a:p>
-            <a:pPr algn="ctr" indent="0" marL="0">
-              <a:buNone/>
-            </a:pPr>
-            <a:r>
-              <a:rPr lang="en-US" sz="1100" dirty="0">
-                <a:solidFill>
-                  <a:srgbClr val="6A7B87"/>
-                </a:solidFill>
-                <a:latin typeface="Calibri" pitchFamily="34" charset="0"/>
-                <a:ea typeface="Calibri" pitchFamily="34" charset="-122"/>
-                <a:cs typeface="Calibri" pitchFamily="34" charset="-120"/>
-              </a:rPr>
-              <a:t>CNN · Isolation Forest · cases</a:t>
-            </a:r>
-            <a:endParaRPr lang="en-US" sz="1100" dirty="0"/>
-          </a:p>
-        </p:txBody>
-      </p:sp>
-      <p:sp>
-        <p:nvSpPr>
-          <p:cNvPr id="19" name="Text 17"/>
-          <p:cNvSpPr txBox="1"/>
-          <p:nvPr/>
-        </p:nvSpPr>
-        <p:spPr>
-          <a:xfrm>
-            <a:off x="9500616" y="2560320"/>
-            <a:ext cx="274320" cy="457200"/>
-          </a:xfrm>
-          <a:prstGeom prst="rect">
-            <a:avLst/>
-          </a:prstGeom>
-          <a:noFill/>
-          <a:ln/>
-        </p:spPr>
-        <p:txBody>
-          <a:bodyPr wrap="square" lIns="0" tIns="0" rIns="0" bIns="0" rtlCol="0" anchor="ctr"/>
-          <a:lstStyle/>
-          <a:p>
-            <a:pPr algn="ctr" indent="0" marL="0">
-              <a:buNone/>
-            </a:pPr>
-            <a:r>
-              <a:rPr lang="en-US" sz="2000" dirty="0">
-                <a:solidFill>
-                  <a:srgbClr val="1B8A8F"/>
-                </a:solidFill>
-                <a:latin typeface="Calibri" pitchFamily="34" charset="0"/>
-                <a:ea typeface="Calibri" pitchFamily="34" charset="-122"/>
-                <a:cs typeface="Calibri" pitchFamily="34" charset="-120"/>
-              </a:rPr>
-              <a:t>→</a:t>
-            </a:r>
-            <a:endParaRPr lang="en-US" sz="2000" dirty="0"/>
-          </a:p>
-        </p:txBody>
-      </p:sp>
-      <p:sp>
-        <p:nvSpPr>
-          <p:cNvPr id="20" name="Shape 18"/>
-          <p:cNvSpPr/>
-          <p:nvPr/>
-        </p:nvSpPr>
-        <p:spPr>
-          <a:xfrm>
-            <a:off x="9756648" y="2148840"/>
-            <a:ext cx="2011680" cy="1371600"/>
-          </a:xfrm>
-          <a:prstGeom prst="roundRect">
-            <a:avLst>
-              <a:gd name="adj" fmla="val 2667"/>
-            </a:avLst>
-          </a:prstGeom>
-          <a:solidFill>
-            <a:srgbClr val="FFFFFF"/>
-          </a:solidFill>
-          <a:ln w="12700">
-            <a:solidFill>
-              <a:srgbClr val="D6DEE4"/>
-            </a:solidFill>
-            <a:prstDash val="solid"/>
-          </a:ln>
-          <a:effectLst>
-            <a:outerShdw sx="100000" sy="100000" kx="0" ky="0" algn="bl" rotWithShape="0" blurRad="127000" dist="25400" dir="5400000">
-              <a:srgbClr val="9AA9B4">
-                <a:alpha val="22000"/>
-              </a:srgbClr>
-            </a:outerShdw>
-          </a:effectLst>
-        </p:spPr>
-      </p:sp>
-      <p:sp>
-        <p:nvSpPr>
-          <p:cNvPr id="21" name="Text 19"/>
-          <p:cNvSpPr txBox="1"/>
-          <p:nvPr/>
-        </p:nvSpPr>
-        <p:spPr>
-          <a:xfrm>
-            <a:off x="9866376" y="2331720"/>
-            <a:ext cx="1792224" cy="384048"/>
-          </a:xfrm>
-          <a:prstGeom prst="rect">
-            <a:avLst/>
-          </a:prstGeom>
-          <a:noFill/>
-          <a:ln/>
-        </p:spPr>
-        <p:txBody>
-          <a:bodyPr wrap="square" lIns="0" tIns="0" rIns="0" bIns="0" rtlCol="0" anchor="ctr"/>
-          <a:lstStyle/>
-          <a:p>
-            <a:pPr algn="ctr" indent="0" marL="0">
-              <a:buNone/>
-            </a:pPr>
-            <a:r>
-              <a:rPr lang="en-US" sz="1500" b="1" dirty="0">
-                <a:solidFill>
-                  <a:srgbClr val="0E1C2B"/>
-                </a:solidFill>
-                <a:latin typeface="Calibri" pitchFamily="34" charset="0"/>
-                <a:ea typeface="Calibri" pitchFamily="34" charset="-122"/>
-                <a:cs typeface="Calibri" pitchFamily="34" charset="-120"/>
-              </a:rPr>
-              <a:t>watsonx.ai</a:t>
-            </a:r>
-            <a:endParaRPr lang="en-US" sz="1500" dirty="0"/>
-          </a:p>
-        </p:txBody>
-      </p:sp>
-      <p:sp>
-        <p:nvSpPr>
-          <p:cNvPr id="22" name="Text 20"/>
-          <p:cNvSpPr txBox="1"/>
-          <p:nvPr/>
-        </p:nvSpPr>
-        <p:spPr>
-          <a:xfrm>
-            <a:off x="9866376" y="2743200"/>
-            <a:ext cx="1792224" cy="640080"/>
-          </a:xfrm>
-          <a:prstGeom prst="rect">
-            <a:avLst/>
-          </a:prstGeom>
-          <a:noFill/>
-          <a:ln/>
-        </p:spPr>
-        <p:txBody>
-          <a:bodyPr wrap="square" lIns="0" tIns="0" rIns="0" bIns="0" rtlCol="0" anchor="ctr"/>
-          <a:lstStyle/>
-          <a:p>
-            <a:pPr algn="ctr" indent="0" marL="0">
-              <a:buNone/>
-            </a:pPr>
-            <a:r>
-              <a:rPr lang="en-US" sz="1100" dirty="0">
-                <a:solidFill>
-                  <a:srgbClr val="6A7B87"/>
-                </a:solidFill>
-                <a:latin typeface="Calibri" pitchFamily="34" charset="0"/>
-                <a:ea typeface="Calibri" pitchFamily="34" charset="-122"/>
-                <a:cs typeface="Calibri" pitchFamily="34" charset="-120"/>
-              </a:rPr>
-              <a:t>Granite reasoning</a:t>
-            </a:r>
-            <a:endParaRPr lang="en-US" sz="1100" dirty="0"/>
-          </a:p>
-        </p:txBody>
-      </p:sp>
-      <p:sp>
-        <p:nvSpPr>
-          <p:cNvPr id="23" name="Shape 21"/>
-          <p:cNvSpPr/>
-          <p:nvPr/>
-        </p:nvSpPr>
-        <p:spPr>
-          <a:xfrm>
-            <a:off x="685800" y="3931920"/>
-            <a:ext cx="10835640" cy="1874520"/>
-          </a:xfrm>
-          <a:prstGeom prst="roundRect">
-            <a:avLst>
-              <a:gd name="adj" fmla="val 1951"/>
-            </a:avLst>
-          </a:prstGeom>
-          <a:solidFill>
-            <a:srgbClr val="0E1C2B"/>
-          </a:solidFill>
-          <a:ln w="12700">
-            <a:solidFill>
-              <a:srgbClr val="0E1C2B"/>
-            </a:solidFill>
-            <a:prstDash val="solid"/>
-          </a:ln>
-        </p:spPr>
-      </p:sp>
-      <p:sp>
-        <p:nvSpPr>
-          <p:cNvPr id="24" name="Text 22"/>
-          <p:cNvSpPr txBox="1"/>
-          <p:nvPr/>
-        </p:nvSpPr>
-        <p:spPr>
-          <a:xfrm>
-            <a:off x="1005840" y="4160520"/>
-            <a:ext cx="10149840" cy="384048"/>
-          </a:xfrm>
-          <a:prstGeom prst="rect">
-            <a:avLst/>
-          </a:prstGeom>
-          <a:noFill/>
-          <a:ln/>
-        </p:spPr>
-        <p:txBody>
-          <a:bodyPr wrap="square" lIns="0" tIns="0" rIns="0" bIns="0" rtlCol="0" anchor="ctr"/>
-          <a:lstStyle/>
-          <a:p>
-            <a:pPr indent="0" marL="0">
-              <a:buNone/>
-            </a:pPr>
-            <a:r>
-              <a:rPr lang="en-US" sz="2000" b="1" dirty="0">
-                <a:solidFill>
-                  <a:srgbClr val="FFFFFF"/>
-                </a:solidFill>
-                <a:latin typeface="Cambria" pitchFamily="34" charset="0"/>
-                <a:ea typeface="Cambria" pitchFamily="34" charset="-122"/>
-                <a:cs typeface="Cambria" pitchFamily="34" charset="-120"/>
-              </a:rPr>
-              <a:t>rank_root_causes takes evidence as ARGUMENTS</a:t>
-            </a:r>
-            <a:endParaRPr lang="en-US" sz="2000" dirty="0"/>
-          </a:p>
-        </p:txBody>
-      </p:sp>
-      <p:sp>
-        <p:nvSpPr>
-          <p:cNvPr id="25" name="Text 23"/>
-          <p:cNvSpPr txBox="1"/>
-          <p:nvPr/>
-        </p:nvSpPr>
-        <p:spPr>
-          <a:xfrm>
-            <a:off x="1005840" y="4617720"/>
-            <a:ext cx="10149840" cy="1005840"/>
+            <a:off x="594360" y="868680"/>
+            <a:ext cx="8138160" cy="329184"/>
           </a:xfrm>
           <a:prstGeom prst="rect">
             <a:avLst/>
@@ -11128,15 +10314,200 @@
             <a:r>
               <a:rPr lang="en-US" sz="1400" dirty="0">
                 <a:solidFill>
-                  <a:srgbClr val="CFDCE4"/>
+                  <a:srgbClr val="6A7B87"/>
                 </a:solidFill>
                 <a:latin typeface="Calibri" pitchFamily="34" charset="0"/>
                 <a:ea typeface="Calibri" pitchFamily="34" charset="-122"/>
                 <a:cs typeface="Calibri" pitchFamily="34" charset="-120"/>
               </a:rPr>
-              <a:t>Bob calls classify, score, retrieve and query_telemetry, then passes all four results in. The server never chains its own tools — if it fetched its own inputs, Bob would be a chat skin over a fixed pipeline. That distinction is visible in the code, and it is the one a judge should check.</a:t>
+              <a:t>9 MCP tools over stdio — Bob chooses and chains them</a:t>
             </a:r>
             <a:endParaRPr lang="en-US" sz="1400" dirty="0"/>
+          </a:p>
+        </p:txBody>
+      </p:sp>
+      <p:sp>
+        <p:nvSpPr>
+          <p:cNvPr id="4" name="Shape 2"/>
+          <p:cNvSpPr/>
+          <p:nvPr/>
+        </p:nvSpPr>
+        <p:spPr>
+          <a:xfrm>
+            <a:off x="8915400" y="365760"/>
+            <a:ext cx="2679192" cy="786384"/>
+          </a:xfrm>
+          <a:prstGeom prst="roundRect">
+            <a:avLst>
+              <a:gd name="adj" fmla="val 6977"/>
+            </a:avLst>
+          </a:prstGeom>
+          <a:solidFill>
+            <a:srgbClr val="0E1C2B"/>
+          </a:solidFill>
+          <a:ln w="12700">
+            <a:solidFill>
+              <a:srgbClr val="0E1C2B"/>
+            </a:solidFill>
+            <a:prstDash val="solid"/>
+          </a:ln>
+        </p:spPr>
+      </p:sp>
+      <p:sp>
+        <p:nvSpPr>
+          <p:cNvPr id="5" name="Text 3"/>
+          <p:cNvSpPr txBox="1"/>
+          <p:nvPr/>
+        </p:nvSpPr>
+        <p:spPr>
+          <a:xfrm>
+            <a:off x="9052560" y="438912"/>
+            <a:ext cx="2404872" cy="640080"/>
+          </a:xfrm>
+          <a:prstGeom prst="rect">
+            <a:avLst/>
+          </a:prstGeom>
+          <a:noFill/>
+          <a:ln/>
+        </p:spPr>
+        <p:txBody>
+          <a:bodyPr wrap="square" lIns="0" tIns="0" rIns="0" bIns="0" rtlCol="0" anchor="ctr"/>
+          <a:lstStyle/>
+          <a:p>
+            <a:pPr algn="ctr" indent="0" marL="0">
+              <a:buNone/>
+            </a:pPr>
+            <a:r>
+              <a:rPr lang="en-US" sz="1250" b="1" dirty="0">
+                <a:solidFill>
+                  <a:srgbClr val="FFFFFF"/>
+                </a:solidFill>
+                <a:latin typeface="Calibri" pitchFamily="34" charset="0"/>
+                <a:ea typeface="Calibri" pitchFamily="34" charset="-122"/>
+                <a:cs typeface="Calibri" pitchFamily="34" charset="-120"/>
+              </a:rPr>
+              <a:t>rank_root_causes takes</a:t>
+            </a:r>
+            <a:endParaRPr lang="en-US" sz="1250" dirty="0"/>
+          </a:p>
+          <a:p>
+            <a:pPr algn="ctr" indent="0" marL="0">
+              <a:buNone/>
+            </a:pPr>
+            <a:r>
+              <a:rPr lang="en-US" sz="1250" b="1" dirty="0">
+                <a:solidFill>
+                  <a:srgbClr val="FFFFFF"/>
+                </a:solidFill>
+                <a:latin typeface="Calibri" pitchFamily="34" charset="0"/>
+                <a:ea typeface="Calibri" pitchFamily="34" charset="-122"/>
+                <a:cs typeface="Calibri" pitchFamily="34" charset="-120"/>
+              </a:rPr>
+              <a:t>evidence as ARGUMENTS</a:t>
+            </a:r>
+            <a:endParaRPr lang="en-US" sz="1250" dirty="0"/>
+          </a:p>
+        </p:txBody>
+      </p:sp>
+      <p:pic>
+        <p:nvPicPr>
+          <p:cNvPr id="6" name="Image 0" descr="/private/tmp/claude-501/-Users-dhrumilamin-Projects-ddg/379433d1-ebea-44ea-8b2f-125009a10940/scratchpad/deck/architecture.png">    </p:cNvPr>
+          <p:cNvPicPr>
+            <a:picLocks noChangeAspect="1"/>
+          </p:cNvPicPr>
+          <p:nvPr/>
+        </p:nvPicPr>
+        <p:blipFill>
+          <a:blip r:embed="rId1"/>
+          <a:stretch>
+            <a:fillRect/>
+          </a:stretch>
+        </p:blipFill>
+        <p:spPr>
+          <a:xfrm>
+            <a:off x="457200" y="1280160"/>
+            <a:ext cx="11274552" cy="4443984"/>
+          </a:xfrm>
+          <a:prstGeom prst="rect">
+            <a:avLst/>
+          </a:prstGeom>
+        </p:spPr>
+      </p:pic>
+      <p:sp>
+        <p:nvSpPr>
+          <p:cNvPr id="7" name="Text 4"/>
+          <p:cNvSpPr txBox="1"/>
+          <p:nvPr/>
+        </p:nvSpPr>
+        <p:spPr>
+          <a:xfrm>
+            <a:off x="594360" y="5852160"/>
+            <a:ext cx="11000232" cy="384048"/>
+          </a:xfrm>
+          <a:prstGeom prst="rect">
+            <a:avLst/>
+          </a:prstGeom>
+          <a:noFill/>
+          <a:ln/>
+        </p:spPr>
+        <p:txBody>
+          <a:bodyPr wrap="square" lIns="0" tIns="0" rIns="0" bIns="0" rtlCol="0" anchor="ctr"/>
+          <a:lstStyle/>
+          <a:p>
+            <a:pPr indent="0" marL="0">
+              <a:buNone/>
+            </a:pPr>
+            <a:r>
+              <a:rPr lang="en-US" sz="1450" dirty="0">
+                <a:solidFill>
+                  <a:srgbClr val="0E1C2B"/>
+                </a:solidFill>
+                <a:latin typeface="Calibri" pitchFamily="34" charset="0"/>
+                <a:ea typeface="Calibri" pitchFamily="34" charset="-122"/>
+                <a:cs typeface="Calibri" pitchFamily="34" charset="-120"/>
+              </a:rPr>
+              <a:t>Bob calls classify, score, retrieve and query_telemetry — then passes all four results IN. The server never chains its own tools.</a:t>
+            </a:r>
+            <a:endParaRPr lang="en-US" sz="1450" dirty="0"/>
+          </a:p>
+        </p:txBody>
+      </p:sp>
+      <p:sp>
+        <p:nvSpPr>
+          <p:cNvPr id="8" name="Text 5"/>
+          <p:cNvSpPr txBox="1"/>
+          <p:nvPr/>
+        </p:nvSpPr>
+        <p:spPr>
+          <a:xfrm>
+            <a:off x="594360" y="6217920"/>
+            <a:ext cx="11000232" cy="347472"/>
+          </a:xfrm>
+          <a:prstGeom prst="rect">
+            <a:avLst/>
+          </a:prstGeom>
+          <a:noFill/>
+          <a:ln/>
+        </p:spPr>
+        <p:txBody>
+          <a:bodyPr wrap="square" lIns="0" tIns="0" rIns="0" bIns="0" rtlCol="0" anchor="ctr"/>
+          <a:lstStyle/>
+          <a:p>
+            <a:pPr indent="0" marL="0">
+              <a:buNone/>
+            </a:pPr>
+            <a:r>
+              <a:rPr lang="en-US" sz="1250" i="1" dirty="0">
+                <a:solidFill>
+                  <a:srgbClr val="6A7B87"/>
+                </a:solidFill>
+                <a:latin typeface="Calibri" pitchFamily="34" charset="0"/>
+                <a:ea typeface="Calibri" pitchFamily="34" charset="-122"/>
+                <a:cs typeface="Calibri" pitchFamily="34" charset="-120"/>
+              </a:rPr>
+              <a:t>If it fetched its own inputs, Bob would be a chat skin over a fixed pipeline — and that distinction is visible in the code.</a:t>
+            </a:r>
+            <a:endParaRPr lang="en-US" sz="1250" dirty="0"/>
           </a:p>
         </p:txBody>
       </p:sp>
